--- a/11а клас/РС/7. Свързване на приложения с бази от данни/06. Класове в ORM.pptx
+++ b/11а клас/РС/7. Свързване на приложения с бази от данни/06. Класове в ORM.pptx
@@ -20,6 +20,8 @@
     <p:sldId id="642" r:id="rId11"/>
     <p:sldId id="643" r:id="rId12"/>
     <p:sldId id="572" r:id="rId13"/>
+    <p:sldId id="644" r:id="rId21"/>
+    <p:sldId id="645" r:id="rId22"/>
   </p:sldIdLst>
   <p:sldSz cx="12192000" cy="6858000"/>
   <p:notesSz cx="6858000" cy="9144000"/>
@@ -993,7 +995,9 @@
           <a:bodyPr/>
           <a:lstStyle/>
           <a:p>
-            <a:endParaRPr lang="bg-BG"/>
+            <a:r>
+              <a:t>Три класа. DbSet съдържа + следи + изпраща.</a:t>
+            </a:r>
           </a:p>
         </p:txBody>
       </p:sp>
@@ -1078,6 +1082,776 @@
         <p14:creationId xmlns:p14="http://schemas.microsoft.com/office/powerpoint/2010/main" val="4272781246"/>
       </p:ext>
     </p:extLst>
+  </p:cSld>
+  <p:clrMapOvr>
+    <a:masterClrMapping/>
+  </p:clrMapOvr>
+</p:notes>
+</file>
+
+<file path=ppt/notesSlides/notesSlide10.xml><?xml version="1.0" encoding="utf-8"?>
+<p:notes xmlns:a="http://schemas.openxmlformats.org/drawingml/2006/main" xmlns:p="http://schemas.openxmlformats.org/presentationml/2006/main" xmlns:r="http://schemas.openxmlformats.org/officeDocument/2006/relationships">
+  <p:cSld>
+    <p:spTree>
+      <p:nvGrpSpPr>
+        <p:cNvPr id="1" name=""/>
+        <p:cNvGrpSpPr/>
+        <p:nvPr/>
+      </p:nvGrpSpPr>
+      <p:grpSpPr>
+        <a:xfrm>
+          <a:off x="0" y="0"/>
+          <a:ext cx="0" cy="0"/>
+          <a:chOff x="0" y="0"/>
+          <a:chExt cx="0" cy="0"/>
+        </a:xfrm>
+      </p:grpSpPr>
+      <p:sp>
+        <p:nvSpPr>
+          <p:cNvPr id="2" name="Slide Image Placeholder 1"/>
+          <p:cNvSpPr>
+            <a:spLocks noGrp="1"/>
+          </p:cNvSpPr>
+          <p:nvPr>
+            <p:ph type="sldImg" idx="2"/>
+          </p:nvPr>
+        </p:nvSpPr>
+        <p:spPr/>
+      </p:sp>
+      <p:sp>
+        <p:nvSpPr>
+          <p:cNvPr id="3" name="Notes Placeholder 2"/>
+          <p:cNvSpPr>
+            <a:spLocks noGrp="1"/>
+          </p:cNvSpPr>
+          <p:nvPr>
+            <p:ph type="body" idx="3" sz="quarter"/>
+          </p:nvPr>
+        </p:nvSpPr>
+        <p:spPr/>
+        <p:txBody>
+          <a:bodyPr/>
+          <a:lstStyle/>
+          <a:p>
+            <a:r>
+              <a:t>Activator.CreateInstance&lt;T&gt;(): нов обект без new. SetValue/GetValue: копира стойности.</a:t>
+            </a:r>
+          </a:p>
+        </p:txBody>
+      </p:sp>
+      <p:sp>
+        <p:nvSpPr>
+          <p:cNvPr id="4" name="Slide Number Placeholder 3"/>
+          <p:cNvSpPr>
+            <a:spLocks noGrp="1"/>
+          </p:cNvSpPr>
+          <p:nvPr>
+            <p:ph type="sldNum" idx="5" sz="quarter"/>
+          </p:nvPr>
+        </p:nvSpPr>
+        <p:spPr/>
+      </p:sp>
+    </p:spTree>
+  </p:cSld>
+  <p:clrMapOvr>
+    <a:masterClrMapping/>
+  </p:clrMapOvr>
+</p:notes>
+</file>
+
+<file path=ppt/notesSlides/notesSlide11.xml><?xml version="1.0" encoding="utf-8"?>
+<p:notes xmlns:a="http://schemas.openxmlformats.org/drawingml/2006/main" xmlns:p="http://schemas.openxmlformats.org/presentationml/2006/main" xmlns:r="http://schemas.openxmlformats.org/officeDocument/2006/relationships">
+  <p:cSld>
+    <p:spTree>
+      <p:nvGrpSpPr>
+        <p:cNvPr id="1" name=""/>
+        <p:cNvGrpSpPr/>
+        <p:nvPr/>
+      </p:nvGrpSpPr>
+      <p:grpSpPr>
+        <a:xfrm>
+          <a:off x="0" y="0"/>
+          <a:ext cx="0" cy="0"/>
+          <a:chOff x="0" y="0"/>
+          <a:chExt cx="0" cy="0"/>
+        </a:xfrm>
+      </p:grpSpPr>
+      <p:sp>
+        <p:nvSpPr>
+          <p:cNvPr id="2" name="Slide Image Placeholder 1"/>
+          <p:cNvSpPr>
+            <a:spLocks noGrp="1"/>
+          </p:cNvSpPr>
+          <p:nvPr>
+            <p:ph type="sldImg" idx="2"/>
+          </p:nvPr>
+        </p:nvSpPr>
+        <p:spPr/>
+      </p:sp>
+      <p:sp>
+        <p:nvSpPr>
+          <p:cNvPr id="3" name="Notes Placeholder 2"/>
+          <p:cNvSpPr>
+            <a:spLocks noGrp="1"/>
+          </p:cNvSpPr>
+          <p:nvPr>
+            <p:ph type="body" idx="3" sz="quarter"/>
+          </p:nvPr>
+        </p:nvSpPr>
+        <p:spPr/>
+        <p:txBody>
+          <a:bodyPr/>
+          <a:lstStyle/>
+          <a:p>
+            <a:r>
+              <a:t>Нарисувайте блок-схема на SaveChanges.</a:t>
+            </a:r>
+          </a:p>
+        </p:txBody>
+      </p:sp>
+      <p:sp>
+        <p:nvSpPr>
+          <p:cNvPr id="4" name="Slide Number Placeholder 3"/>
+          <p:cNvSpPr>
+            <a:spLocks noGrp="1"/>
+          </p:cNvSpPr>
+          <p:nvPr>
+            <p:ph type="sldNum" idx="5" sz="quarter"/>
+          </p:nvPr>
+        </p:nvSpPr>
+        <p:spPr/>
+      </p:sp>
+    </p:spTree>
+  </p:cSld>
+  <p:clrMapOvr>
+    <a:masterClrMapping/>
+  </p:clrMapOvr>
+</p:notes>
+</file>
+
+<file path=ppt/notesSlides/notesSlide12.xml><?xml version="1.0" encoding="utf-8"?>
+<p:notes xmlns:a="http://schemas.openxmlformats.org/drawingml/2006/main" xmlns:p="http://schemas.openxmlformats.org/presentationml/2006/main" xmlns:r="http://schemas.openxmlformats.org/officeDocument/2006/relationships">
+  <p:cSld>
+    <p:spTree>
+      <p:nvGrpSpPr>
+        <p:cNvPr id="1" name=""/>
+        <p:cNvGrpSpPr/>
+        <p:nvPr/>
+      </p:nvGrpSpPr>
+      <p:grpSpPr>
+        <a:xfrm>
+          <a:off x="0" y="0"/>
+          <a:ext cx="0" cy="0"/>
+          <a:chOff x="0" y="0"/>
+          <a:chExt cx="0" cy="0"/>
+        </a:xfrm>
+      </p:grpSpPr>
+      <p:sp>
+        <p:nvSpPr>
+          <p:cNvPr id="2" name="Slide Image Placeholder 1"/>
+          <p:cNvSpPr>
+            <a:spLocks noGrp="1"/>
+          </p:cNvSpPr>
+          <p:nvPr>
+            <p:ph type="sldImg" idx="2"/>
+          </p:nvPr>
+        </p:nvSpPr>
+        <p:spPr/>
+      </p:sp>
+      <p:sp>
+        <p:nvSpPr>
+          <p:cNvPr id="3" name="Notes Placeholder 2"/>
+          <p:cNvSpPr>
+            <a:spLocks noGrp="1"/>
+          </p:cNvSpPr>
+          <p:nvPr>
+            <p:ph type="body" idx="3" sz="quarter"/>
+          </p:nvPr>
+        </p:nvSpPr>
+        <p:spPr/>
+        <p:txBody>
+          <a:bodyPr/>
+          <a:lstStyle/>
+          <a:p>
+            <a:r>
+              <a:t>Ефективно и безопасно - атомарна операция.</a:t>
+            </a:r>
+          </a:p>
+        </p:txBody>
+      </p:sp>
+      <p:sp>
+        <p:nvSpPr>
+          <p:cNvPr id="4" name="Slide Number Placeholder 3"/>
+          <p:cNvSpPr>
+            <a:spLocks noGrp="1"/>
+          </p:cNvSpPr>
+          <p:nvPr>
+            <p:ph type="sldNum" idx="5" sz="quarter"/>
+          </p:nvPr>
+        </p:nvSpPr>
+        <p:spPr/>
+      </p:sp>
+    </p:spTree>
+  </p:cSld>
+  <p:clrMapOvr>
+    <a:masterClrMapping/>
+  </p:clrMapOvr>
+</p:notes>
+</file>
+
+<file path=ppt/notesSlides/notesSlide2.xml><?xml version="1.0" encoding="utf-8"?>
+<p:notes xmlns:a="http://schemas.openxmlformats.org/drawingml/2006/main" xmlns:p="http://schemas.openxmlformats.org/presentationml/2006/main" xmlns:r="http://schemas.openxmlformats.org/officeDocument/2006/relationships">
+  <p:cSld>
+    <p:spTree>
+      <p:nvGrpSpPr>
+        <p:cNvPr id="1" name=""/>
+        <p:cNvGrpSpPr/>
+        <p:nvPr/>
+      </p:nvGrpSpPr>
+      <p:grpSpPr>
+        <a:xfrm>
+          <a:off x="0" y="0"/>
+          <a:ext cx="0" cy="0"/>
+          <a:chOff x="0" y="0"/>
+          <a:chExt cx="0" cy="0"/>
+        </a:xfrm>
+      </p:grpSpPr>
+      <p:sp>
+        <p:nvSpPr>
+          <p:cNvPr id="2" name="Slide Image Placeholder 1"/>
+          <p:cNvSpPr>
+            <a:spLocks noGrp="1"/>
+          </p:cNvSpPr>
+          <p:nvPr>
+            <p:ph type="sldImg" idx="2"/>
+          </p:nvPr>
+        </p:nvSpPr>
+        <p:spPr/>
+      </p:sp>
+      <p:sp>
+        <p:nvSpPr>
+          <p:cNvPr id="3" name="Notes Placeholder 2"/>
+          <p:cNvSpPr>
+            <a:spLocks noGrp="1"/>
+          </p:cNvSpPr>
+          <p:nvPr>
+            <p:ph type="body" idx="3" sz="quarter"/>
+          </p:nvPr>
+        </p:nvSpPr>
+        <p:spPr/>
+        <p:txBody>
+          <a:bodyPr/>
+          <a:lstStyle/>
+          <a:p>
+            <a:r>
+              <a:t>DbSet, DbContext, ChangeTracker. DbSet = умна List&lt;T&gt;.</a:t>
+            </a:r>
+          </a:p>
+        </p:txBody>
+      </p:sp>
+      <p:sp>
+        <p:nvSpPr>
+          <p:cNvPr id="4" name="Slide Number Placeholder 3"/>
+          <p:cNvSpPr>
+            <a:spLocks noGrp="1"/>
+          </p:cNvSpPr>
+          <p:nvPr>
+            <p:ph type="sldNum" idx="5" sz="quarter"/>
+          </p:nvPr>
+        </p:nvSpPr>
+        <p:spPr/>
+      </p:sp>
+    </p:spTree>
+  </p:cSld>
+  <p:clrMapOvr>
+    <a:masterClrMapping/>
+  </p:clrMapOvr>
+</p:notes>
+</file>
+
+<file path=ppt/notesSlides/notesSlide3.xml><?xml version="1.0" encoding="utf-8"?>
+<p:notes xmlns:a="http://schemas.openxmlformats.org/drawingml/2006/main" xmlns:p="http://schemas.openxmlformats.org/presentationml/2006/main" xmlns:r="http://schemas.openxmlformats.org/officeDocument/2006/relationships">
+  <p:cSld>
+    <p:spTree>
+      <p:nvGrpSpPr>
+        <p:cNvPr id="1" name=""/>
+        <p:cNvGrpSpPr/>
+        <p:nvPr/>
+      </p:nvGrpSpPr>
+      <p:grpSpPr>
+        <a:xfrm>
+          <a:off x="0" y="0"/>
+          <a:ext cx="0" cy="0"/>
+          <a:chOff x="0" y="0"/>
+          <a:chExt cx="0" cy="0"/>
+        </a:xfrm>
+      </p:grpSpPr>
+      <p:sp>
+        <p:nvSpPr>
+          <p:cNvPr id="2" name="Slide Image Placeholder 1"/>
+          <p:cNvSpPr>
+            <a:spLocks noGrp="1"/>
+          </p:cNvSpPr>
+          <p:nvPr>
+            <p:ph type="sldImg" idx="2"/>
+          </p:nvPr>
+        </p:nvSpPr>
+        <p:spPr/>
+      </p:sp>
+      <p:sp>
+        <p:nvSpPr>
+          <p:cNvPr id="3" name="Notes Placeholder 2"/>
+          <p:cNvSpPr>
+            <a:spLocks noGrp="1"/>
+          </p:cNvSpPr>
+          <p:nvPr>
+            <p:ph type="body" idx="3" sz="quarter"/>
+          </p:nvPr>
+        </p:nvSpPr>
+        <p:spPr/>
+        <p:txBody>
+          <a:bodyPr/>
+          <a:lstStyle/>
+          <a:p>
+            <a:r>
+              <a:t>ДбСет = умна List&lt;T&gt;. ICollection&lt;T&gt; - по-ограничен интерфейс.</a:t>
+            </a:r>
+          </a:p>
+        </p:txBody>
+      </p:sp>
+      <p:sp>
+        <p:nvSpPr>
+          <p:cNvPr id="4" name="Slide Number Placeholder 3"/>
+          <p:cNvSpPr>
+            <a:spLocks noGrp="1"/>
+          </p:cNvSpPr>
+          <p:nvPr>
+            <p:ph type="sldNum" idx="5" sz="quarter"/>
+          </p:nvPr>
+        </p:nvSpPr>
+        <p:spPr/>
+      </p:sp>
+    </p:spTree>
+  </p:cSld>
+  <p:clrMapOvr>
+    <a:masterClrMapping/>
+  </p:clrMapOvr>
+</p:notes>
+</file>
+
+<file path=ppt/notesSlides/notesSlide4.xml><?xml version="1.0" encoding="utf-8"?>
+<p:notes xmlns:a="http://schemas.openxmlformats.org/drawingml/2006/main" xmlns:p="http://schemas.openxmlformats.org/presentationml/2006/main" xmlns:r="http://schemas.openxmlformats.org/officeDocument/2006/relationships">
+  <p:cSld>
+    <p:spTree>
+      <p:nvGrpSpPr>
+        <p:cNvPr id="1" name=""/>
+        <p:cNvGrpSpPr/>
+        <p:nvPr/>
+      </p:nvGrpSpPr>
+      <p:grpSpPr>
+        <a:xfrm>
+          <a:off x="0" y="0"/>
+          <a:ext cx="0" cy="0"/>
+          <a:chOff x="0" y="0"/>
+          <a:chExt cx="0" cy="0"/>
+        </a:xfrm>
+      </p:grpSpPr>
+      <p:sp>
+        <p:nvSpPr>
+          <p:cNvPr id="2" name="Slide Image Placeholder 1"/>
+          <p:cNvSpPr>
+            <a:spLocks noGrp="1"/>
+          </p:cNvSpPr>
+          <p:nvPr>
+            <p:ph type="sldImg" idx="2"/>
+          </p:nvPr>
+        </p:nvSpPr>
+        <p:spPr/>
+      </p:sp>
+      <p:sp>
+        <p:nvSpPr>
+          <p:cNvPr id="3" name="Notes Placeholder 2"/>
+          <p:cNvSpPr>
+            <a:spLocks noGrp="1"/>
+          </p:cNvSpPr>
+          <p:nvPr>
+            <p:ph type="body" idx="3" sz="quarter"/>
+          </p:nvPr>
+        </p:nvSpPr>
+        <p:spPr/>
+        <p:txBody>
+          <a:bodyPr/>
+          <a:lstStyle/>
+          <a:p>
+            <a:r>
+              <a:t>ВСЕКИ DbSet&lt;T&gt; = таблица в БД. Add -&gt; Добавя в Entities И ChangeTracker.</a:t>
+            </a:r>
+          </a:p>
+        </p:txBody>
+      </p:sp>
+      <p:sp>
+        <p:nvSpPr>
+          <p:cNvPr id="4" name="Slide Number Placeholder 3"/>
+          <p:cNvSpPr>
+            <a:spLocks noGrp="1"/>
+          </p:cNvSpPr>
+          <p:nvPr>
+            <p:ph type="sldNum" idx="5" sz="quarter"/>
+          </p:nvPr>
+        </p:nvSpPr>
+        <p:spPr/>
+      </p:sp>
+    </p:spTree>
+  </p:cSld>
+  <p:clrMapOvr>
+    <a:masterClrMapping/>
+  </p:clrMapOvr>
+</p:notes>
+</file>
+
+<file path=ppt/notesSlides/notesSlide5.xml><?xml version="1.0" encoding="utf-8"?>
+<p:notes xmlns:a="http://schemas.openxmlformats.org/drawingml/2006/main" xmlns:p="http://schemas.openxmlformats.org/presentationml/2006/main" xmlns:r="http://schemas.openxmlformats.org/officeDocument/2006/relationships">
+  <p:cSld>
+    <p:spTree>
+      <p:nvGrpSpPr>
+        <p:cNvPr id="1" name=""/>
+        <p:cNvGrpSpPr/>
+        <p:nvPr/>
+      </p:nvGrpSpPr>
+      <p:grpSpPr>
+        <a:xfrm>
+          <a:off x="0" y="0"/>
+          <a:ext cx="0" cy="0"/>
+          <a:chOff x="0" y="0"/>
+          <a:chExt cx="0" cy="0"/>
+        </a:xfrm>
+      </p:grpSpPr>
+      <p:sp>
+        <p:nvSpPr>
+          <p:cNvPr id="2" name="Slide Image Placeholder 1"/>
+          <p:cNvSpPr>
+            <a:spLocks noGrp="1"/>
+          </p:cNvSpPr>
+          <p:nvPr>
+            <p:ph type="sldImg" idx="2"/>
+          </p:nvPr>
+        </p:nvSpPr>
+        <p:spPr/>
+      </p:sp>
+      <p:sp>
+        <p:nvSpPr>
+          <p:cNvPr id="3" name="Notes Placeholder 2"/>
+          <p:cNvSpPr>
+            <a:spLocks noGrp="1"/>
+          </p:cNvSpPr>
+          <p:nvPr>
+            <p:ph type="body" idx="3" sz="quarter"/>
+          </p:nvPr>
+        </p:nvSpPr>
+        <p:spPr/>
+        <p:txBody>
+          <a:bodyPr/>
+          <a:lstStyle/>
+          <a:p>
+            <a:r>
+              <a:t>DbContext = Unit of Work. Аналогия: кошница в онлайн магазин.</a:t>
+            </a:r>
+          </a:p>
+        </p:txBody>
+      </p:sp>
+      <p:sp>
+        <p:nvSpPr>
+          <p:cNvPr id="4" name="Slide Number Placeholder 3"/>
+          <p:cNvSpPr>
+            <a:spLocks noGrp="1"/>
+          </p:cNvSpPr>
+          <p:nvPr>
+            <p:ph type="sldNum" idx="5" sz="quarter"/>
+          </p:nvPr>
+        </p:nvSpPr>
+        <p:spPr/>
+      </p:sp>
+    </p:spTree>
+  </p:cSld>
+  <p:clrMapOvr>
+    <a:masterClrMapping/>
+  </p:clrMapOvr>
+</p:notes>
+</file>
+
+<file path=ppt/notesSlides/notesSlide6.xml><?xml version="1.0" encoding="utf-8"?>
+<p:notes xmlns:a="http://schemas.openxmlformats.org/drawingml/2006/main" xmlns:p="http://schemas.openxmlformats.org/presentationml/2006/main" xmlns:r="http://schemas.openxmlformats.org/officeDocument/2006/relationships">
+  <p:cSld>
+    <p:spTree>
+      <p:nvGrpSpPr>
+        <p:cNvPr id="1" name=""/>
+        <p:cNvGrpSpPr/>
+        <p:nvPr/>
+      </p:nvGrpSpPr>
+      <p:grpSpPr>
+        <a:xfrm>
+          <a:off x="0" y="0"/>
+          <a:ext cx="0" cy="0"/>
+          <a:chOff x="0" y="0"/>
+          <a:chExt cx="0" cy="0"/>
+        </a:xfrm>
+      </p:grpSpPr>
+      <p:sp>
+        <p:nvSpPr>
+          <p:cNvPr id="2" name="Slide Image Placeholder 1"/>
+          <p:cNvSpPr>
+            <a:spLocks noGrp="1"/>
+          </p:cNvSpPr>
+          <p:nvPr>
+            <p:ph type="sldImg" idx="2"/>
+          </p:nvPr>
+        </p:nvSpPr>
+        <p:spPr/>
+      </p:sp>
+      <p:sp>
+        <p:nvSpPr>
+          <p:cNvPr id="3" name="Notes Placeholder 2"/>
+          <p:cNvSpPr>
+            <a:spLocks noGrp="1"/>
+          </p:cNvSpPr>
+          <p:nvPr>
+            <p:ph type="body" idx="3" sz="quarter"/>
+          </p:nvPr>
+        </p:nvSpPr>
+        <p:spPr/>
+        <p:txBody>
+          <a:bodyPr/>
+          <a:lstStyle/>
+          <a:p>
+            <a:r>
+              <a:t>Нашите контексти наследяват DbContext. Съдържа DbSet свойства.</a:t>
+            </a:r>
+          </a:p>
+        </p:txBody>
+      </p:sp>
+      <p:sp>
+        <p:nvSpPr>
+          <p:cNvPr id="4" name="Slide Number Placeholder 3"/>
+          <p:cNvSpPr>
+            <a:spLocks noGrp="1"/>
+          </p:cNvSpPr>
+          <p:nvPr>
+            <p:ph type="sldNum" idx="5" sz="quarter"/>
+          </p:nvPr>
+        </p:nvSpPr>
+        <p:spPr/>
+      </p:sp>
+    </p:spTree>
+  </p:cSld>
+  <p:clrMapOvr>
+    <a:masterClrMapping/>
+  </p:clrMapOvr>
+</p:notes>
+</file>
+
+<file path=ppt/notesSlides/notesSlide7.xml><?xml version="1.0" encoding="utf-8"?>
+<p:notes xmlns:a="http://schemas.openxmlformats.org/drawingml/2006/main" xmlns:p="http://schemas.openxmlformats.org/presentationml/2006/main" xmlns:r="http://schemas.openxmlformats.org/officeDocument/2006/relationships">
+  <p:cSld>
+    <p:spTree>
+      <p:nvGrpSpPr>
+        <p:cNvPr id="1" name=""/>
+        <p:cNvGrpSpPr/>
+        <p:nvPr/>
+      </p:nvGrpSpPr>
+      <p:grpSpPr>
+        <a:xfrm>
+          <a:off x="0" y="0"/>
+          <a:ext cx="0" cy="0"/>
+          <a:chOff x="0" y="0"/>
+          <a:chExt cx="0" cy="0"/>
+        </a:xfrm>
+      </p:grpSpPr>
+      <p:sp>
+        <p:nvSpPr>
+          <p:cNvPr id="2" name="Slide Image Placeholder 1"/>
+          <p:cNvSpPr>
+            <a:spLocks noGrp="1"/>
+          </p:cNvSpPr>
+          <p:nvPr>
+            <p:ph type="sldImg" idx="2"/>
+          </p:nvPr>
+        </p:nvSpPr>
+        <p:spPr/>
+      </p:sp>
+      <p:sp>
+        <p:nvSpPr>
+          <p:cNvPr id="3" name="Notes Placeholder 2"/>
+          <p:cNvSpPr>
+            <a:spLocks noGrp="1"/>
+          </p:cNvSpPr>
+          <p:nvPr>
+            <p:ph type="body" idx="3" sz="quarter"/>
+          </p:nvPr>
+        </p:nvSpPr>
+        <p:spPr/>
+        <p:txBody>
+          <a:bodyPr/>
+          <a:lstStyle/>
+          <a:p>
+            <a:r>
+              <a:t>Три колекции: allEntities (клонирани), added, removed.</a:t>
+            </a:r>
+          </a:p>
+        </p:txBody>
+      </p:sp>
+      <p:sp>
+        <p:nvSpPr>
+          <p:cNvPr id="4" name="Slide Number Placeholder 3"/>
+          <p:cNvSpPr>
+            <a:spLocks noGrp="1"/>
+          </p:cNvSpPr>
+          <p:nvPr>
+            <p:ph type="sldNum" idx="5" sz="quarter"/>
+          </p:nvPr>
+        </p:nvSpPr>
+        <p:spPr/>
+      </p:sp>
+    </p:spTree>
+  </p:cSld>
+  <p:clrMapOvr>
+    <a:masterClrMapping/>
+  </p:clrMapOvr>
+</p:notes>
+</file>
+
+<file path=ppt/notesSlides/notesSlide8.xml><?xml version="1.0" encoding="utf-8"?>
+<p:notes xmlns:a="http://schemas.openxmlformats.org/drawingml/2006/main" xmlns:p="http://schemas.openxmlformats.org/presentationml/2006/main" xmlns:r="http://schemas.openxmlformats.org/officeDocument/2006/relationships">
+  <p:cSld>
+    <p:spTree>
+      <p:nvGrpSpPr>
+        <p:cNvPr id="1" name=""/>
+        <p:cNvGrpSpPr/>
+        <p:nvPr/>
+      </p:nvGrpSpPr>
+      <p:grpSpPr>
+        <a:xfrm>
+          <a:off x="0" y="0"/>
+          <a:ext cx="0" cy="0"/>
+          <a:chOff x="0" y="0"/>
+          <a:chExt cx="0" cy="0"/>
+        </a:xfrm>
+      </p:grpSpPr>
+      <p:sp>
+        <p:nvSpPr>
+          <p:cNvPr id="2" name="Slide Image Placeholder 1"/>
+          <p:cNvSpPr>
+            <a:spLocks noGrp="1"/>
+          </p:cNvSpPr>
+          <p:nvPr>
+            <p:ph type="sldImg" idx="2"/>
+          </p:nvPr>
+        </p:nvSpPr>
+        <p:spPr/>
+      </p:sp>
+      <p:sp>
+        <p:nvSpPr>
+          <p:cNvPr id="3" name="Notes Placeholder 2"/>
+          <p:cNvSpPr>
+            <a:spLocks noGrp="1"/>
+          </p:cNvSpPr>
+          <p:nvPr>
+            <p:ph type="body" idx="3" sz="quarter"/>
+          </p:nvPr>
+        </p:nvSpPr>
+        <p:spPr/>
+        <p:txBody>
+          <a:bodyPr/>
+          <a:lstStyle/>
+          <a:p>
+            <a:r>
+              <a:t>IReadOnlyCollection - не може да се модифицира отвън. Инкапсулация!</a:t>
+            </a:r>
+          </a:p>
+        </p:txBody>
+      </p:sp>
+      <p:sp>
+        <p:nvSpPr>
+          <p:cNvPr id="4" name="Slide Number Placeholder 3"/>
+          <p:cNvSpPr>
+            <a:spLocks noGrp="1"/>
+          </p:cNvSpPr>
+          <p:nvPr>
+            <p:ph type="sldNum" idx="5" sz="quarter"/>
+          </p:nvPr>
+        </p:nvSpPr>
+        <p:spPr/>
+      </p:sp>
+    </p:spTree>
+  </p:cSld>
+  <p:clrMapOvr>
+    <a:masterClrMapping/>
+  </p:clrMapOvr>
+</p:notes>
+</file>
+
+<file path=ppt/notesSlides/notesSlide9.xml><?xml version="1.0" encoding="utf-8"?>
+<p:notes xmlns:a="http://schemas.openxmlformats.org/drawingml/2006/main" xmlns:p="http://schemas.openxmlformats.org/presentationml/2006/main" xmlns:r="http://schemas.openxmlformats.org/officeDocument/2006/relationships">
+  <p:cSld>
+    <p:spTree>
+      <p:nvGrpSpPr>
+        <p:cNvPr id="1" name=""/>
+        <p:cNvGrpSpPr/>
+        <p:nvPr/>
+      </p:nvGrpSpPr>
+      <p:grpSpPr>
+        <a:xfrm>
+          <a:off x="0" y="0"/>
+          <a:ext cx="0" cy="0"/>
+          <a:chOff x="0" y="0"/>
+          <a:chExt cx="0" cy="0"/>
+        </a:xfrm>
+      </p:grpSpPr>
+      <p:sp>
+        <p:nvSpPr>
+          <p:cNvPr id="2" name="Slide Image Placeholder 1"/>
+          <p:cNvSpPr>
+            <a:spLocks noGrp="1"/>
+          </p:cNvSpPr>
+          <p:nvPr>
+            <p:ph type="sldImg" idx="2"/>
+          </p:nvPr>
+        </p:nvSpPr>
+        <p:spPr/>
+      </p:sp>
+      <p:sp>
+        <p:nvSpPr>
+          <p:cNvPr id="3" name="Notes Placeholder 2"/>
+          <p:cNvSpPr>
+            <a:spLocks noGrp="1"/>
+          </p:cNvSpPr>
+          <p:nvPr>
+            <p:ph type="body" idx="3" sz="quarter"/>
+          </p:nvPr>
+        </p:nvSpPr>
+        <p:spPr/>
+        <p:txBody>
+          <a:bodyPr/>
+          <a:lstStyle/>
+          <a:p>
+            <a:r>
+              <a:t>КЛОНИРАМЕ: паметаме оригиналното. При SaveChanges сравняваме клон vs текущ.</a:t>
+            </a:r>
+          </a:p>
+        </p:txBody>
+      </p:sp>
+      <p:sp>
+        <p:nvSpPr>
+          <p:cNvPr id="4" name="Slide Number Placeholder 3"/>
+          <p:cNvSpPr>
+            <a:spLocks noGrp="1"/>
+          </p:cNvSpPr>
+          <p:nvPr>
+            <p:ph type="sldNum" idx="5" sz="quarter"/>
+          </p:nvPr>
+        </p:nvSpPr>
+        <p:spPr/>
+      </p:sp>
+    </p:spTree>
   </p:cSld>
   <p:clrMapOvr>
     <a:masterClrMapping/>
@@ -5558,6 +6332,181 @@
         <p14:creationId xmlns:p14="http://schemas.microsoft.com/office/powerpoint/2010/main" val="1241344677"/>
       </p:ext>
     </p:extLst>
+  </p:cSld>
+  <p:clrMapOvr>
+    <a:masterClrMapping/>
+  </p:clrMapOvr>
+</p:sld>
+</file>
+
+<file path=ppt/slides/slide13.xml><?xml version="1.0" encoding="utf-8"?>
+<p:sld xmlns:a="http://schemas.openxmlformats.org/drawingml/2006/main" xmlns:p="http://schemas.openxmlformats.org/presentationml/2006/main" xmlns:r="http://schemas.openxmlformats.org/officeDocument/2006/relationships">
+  <p:cSld>
+    <p:spTree>
+      <p:nvGrpSpPr>
+        <p:cNvPr id="1" name=""/>
+        <p:cNvGrpSpPr/>
+        <p:nvPr/>
+      </p:nvGrpSpPr>
+      <p:grpSpPr/>
+      <p:sp>
+        <p:nvSpPr>
+          <p:cNvPr id="2" name="Title 1"/>
+          <p:cNvSpPr>
+            <a:spLocks noGrp="1"/>
+          </p:cNvSpPr>
+          <p:nvPr>
+            <p:ph type="title"/>
+          </p:nvPr>
+        </p:nvSpPr>
+        <p:spPr/>
+        <p:txBody>
+          <a:bodyPr/>
+          <a:lstStyle/>
+          <a:p>
+            <a:r>
+              <a:t>SaveChanges() — Какво се случва?</a:t>
+            </a:r>
+          </a:p>
+        </p:txBody>
+      </p:sp>
+      <p:sp>
+        <p:nvSpPr>
+          <p:cNvPr id="3" name="Content Placeholder 2"/>
+          <p:cNvSpPr>
+            <a:spLocks noGrp="1"/>
+          </p:cNvSpPr>
+          <p:nvPr>
+            <p:ph idx="1"/>
+          </p:nvPr>
+        </p:nvSpPr>
+        <p:spPr/>
+        <p:txBody>
+          <a:bodyPr/>
+          <a:lstStyle/>
+          <a:p>
+            <a:r>
+              <a:t>1. ChangeTracker.GetAdded() → генерира INSERT заявки</a:t>
+            </a:r>
+          </a:p>
+          <a:p>
+            <a:r>
+              <a:t>2. ChangeTracker.GetRemoved() → генерира DELETE заявки</a:t>
+            </a:r>
+          </a:p>
+          <a:p>
+            <a:r>
+              <a:t>3. GetModified(): клон vs текущ → UPDATE</a:t>
+            </a:r>
+          </a:p>
+          <a:p>
+            <a:r>
+              <a:t>4. BEGIN TRANSACTION</a:t>
+            </a:r>
+          </a:p>
+          <a:p>
+            <a:r>
+              <a:t>5. Изпълнява всичко SQL</a:t>
+            </a:r>
+          </a:p>
+          <a:p>
+            <a:r>
+              <a:t>6. COMMIT или ROLLBACK</a:t>
+            </a:r>
+          </a:p>
+          <a:p>
+            <a:r>
+              <a:t>ТОЧНО: Без SaveChanges() НИЩО не се записва!</a:t>
+            </a:r>
+          </a:p>
+        </p:txBody>
+      </p:sp>
+    </p:spTree>
+  </p:cSld>
+  <p:clrMapOvr>
+    <a:masterClrMapping/>
+  </p:clrMapOvr>
+</p:sld>
+</file>
+
+<file path=ppt/slides/slide14.xml><?xml version="1.0" encoding="utf-8"?>
+<p:sld xmlns:a="http://schemas.openxmlformats.org/drawingml/2006/main" xmlns:p="http://schemas.openxmlformats.org/presentationml/2006/main" xmlns:r="http://schemas.openxmlformats.org/officeDocument/2006/relationships">
+  <p:cSld>
+    <p:spTree>
+      <p:nvGrpSpPr>
+        <p:cNvPr id="1" name=""/>
+        <p:cNvGrpSpPr/>
+        <p:nvPr/>
+      </p:nvGrpSpPr>
+      <p:grpSpPr/>
+      <p:sp>
+        <p:nvSpPr>
+          <p:cNvPr id="2" name="Title 1"/>
+          <p:cNvSpPr>
+            <a:spLocks noGrp="1"/>
+          </p:cNvSpPr>
+          <p:nvPr>
+            <p:ph type="title"/>
+          </p:nvPr>
+        </p:nvSpPr>
+        <p:spPr/>
+        <p:txBody>
+          <a:bodyPr/>
+          <a:lstStyle/>
+          <a:p>
+            <a:r>
+              <a:t>Unit of Work Pattern</a:t>
+            </a:r>
+          </a:p>
+        </p:txBody>
+      </p:sp>
+      <p:sp>
+        <p:nvSpPr>
+          <p:cNvPr id="3" name="Content Placeholder 2"/>
+          <p:cNvSpPr>
+            <a:spLocks noGrp="1"/>
+          </p:cNvSpPr>
+          <p:nvPr>
+            <p:ph idx="1"/>
+          </p:nvPr>
+        </p:nvSpPr>
+        <p:spPr/>
+        <p:txBody>
+          <a:bodyPr/>
+          <a:lstStyle/>
+          <a:p>
+            <a:r>
+              <a:t>Трупаме промени в паметта, изпращаме наведнъж</a:t>
+            </a:r>
+          </a:p>
+          <a:p>
+            <a:r>
+              <a:t>context.Employees.Add(emp1);</a:t>
+            </a:r>
+          </a:p>
+          <a:p>
+            <a:r>
+              <a:t>context.Employees.Add(emp2);</a:t>
+            </a:r>
+          </a:p>
+          <a:p>
+            <a:r>
+              <a:t>context.Departments.Add(dept);</a:t>
+            </a:r>
+          </a:p>
+          <a:p>
+            <a:r>
+              <a:t>context.SaveChanges(); → 3 INSERT-а в 1 транзакция</a:t>
+            </a:r>
+          </a:p>
+          <a:p>
+            <a:r>
+              <a:t>Аналогия: кошница + Checkout</a:t>
+            </a:r>
+          </a:p>
+        </p:txBody>
+      </p:sp>
+    </p:spTree>
   </p:cSld>
   <p:clrMapOvr>
     <a:masterClrMapping/>
